--- a/SpamAdapt/submission/SpamAdapt_Final_Submission/SpamAdapt_Final_Presentation.pptx
+++ b/SpamAdapt/submission/SpamAdapt_Final_Submission/SpamAdapt_Final_Presentation.pptx
@@ -7630,7 +7630,7 @@
               </a:defRPr>
             </a:pPr>
             <a:r>
-              <a:t>  • Training: 3,612 samples (3,131 HAM, 481 SPAM)</a:t>
+              <a:t>  • Training: 3,612 samples (3,163 HAM, 449 SPAM)</a:t>
             </a:r>
           </a:p>
           <a:p>
@@ -7642,7 +7642,7 @@
               </a:defRPr>
             </a:pPr>
             <a:r>
-              <a:t>  • Validation: 774 samples (677 HAM, 97 SPAM)</a:t>
+              <a:t>  • Validation: 774 samples (678 HAM, 96 SPAM)</a:t>
             </a:r>
           </a:p>
           <a:p>
@@ -7654,7 +7654,7 @@
               </a:defRPr>
             </a:pPr>
             <a:r>
-              <a:t>  • Preserved Test: 774 samples (678 HAM, 96 SPAM)</a:t>
+              <a:t>  • Preserved Test: 774 samples (677 HAM, 97 SPAM)</a:t>
             </a:r>
           </a:p>
           <a:p>
